--- a/deliverables/presentation.pptx
+++ b/deliverables/presentation.pptx
@@ -153,7 +153,7 @@
           <a:p>
             <a:fld id="{26604F21-9B18-4DE1-AB54-6E38A9691DB2}" type="datetimeFigureOut">
               <a:rPr lang="it-IT" smtClean="0"/>
-              <a:t>08/04/2026</a:t>
+              <a:t>16/04/2026</a:t>
             </a:fld>
             <a:endParaRPr lang="it-IT"/>
           </a:p>
@@ -464,7 +464,18 @@
           <a:bodyPr/>
           <a:lstStyle/>
           <a:p>
-            <a:endParaRPr lang="it-IT" dirty="0"/>
+            <a:r>
+              <a:rPr lang="it-IT" dirty="0"/>
+              <a:t>Il progetto dal titolo «Segmentazione di Tumori Cerebrali in Immagini MRI», indaga la segmentazione automatica di tumori cerebrali in immagini di risonanza magnetica, confrontando un approccio </a:t>
+            </a:r>
+            <a:r>
+              <a:rPr lang="it-IT" dirty="0" err="1"/>
+              <a:t>monomodale</a:t>
+            </a:r>
+            <a:r>
+              <a:rPr lang="it-IT" dirty="0"/>
+              <a:t>, con singole sequenze MRI, rispetto a un approccio multimodale, mediante la fusione di più sequenze MRI prima dell’elaborazione.</a:t>
+            </a:r>
           </a:p>
         </p:txBody>
       </p:sp>
@@ -566,7 +577,56 @@
           <a:bodyPr/>
           <a:lstStyle/>
           <a:p>
-            <a:endParaRPr lang="it-IT" dirty="0"/>
+            <a:pPr marL="0" marR="0" lvl="0" indent="0" algn="l" defTabSz="914400" rtl="0" eaLnBrk="1" fontAlgn="auto" latinLnBrk="0" hangingPunct="1">
+              <a:lnSpc>
+                <a:spcPct val="100000"/>
+              </a:lnSpc>
+              <a:spcBef>
+                <a:spcPts val="0"/>
+              </a:spcBef>
+              <a:spcAft>
+                <a:spcPts val="0"/>
+              </a:spcAft>
+              <a:buClrTx/>
+              <a:buSzTx/>
+              <a:buFontTx/>
+              <a:buNone/>
+              <a:tabLst/>
+              <a:defRPr/>
+            </a:pPr>
+            <a:r>
+              <a:rPr lang="it-IT" dirty="0"/>
+              <a:t>Prima di costruire la pipeline finale, è stata svolta una fase esplorativa sul paziente BRATS_218 per confrontare le diverse sequenze.</a:t>
+            </a:r>
+          </a:p>
+          <a:p>
+            <a:pPr marL="0" marR="0" lvl="0" indent="0" algn="l" defTabSz="914400" rtl="0" eaLnBrk="1" fontAlgn="auto" latinLnBrk="0" hangingPunct="1">
+              <a:lnSpc>
+                <a:spcPct val="100000"/>
+              </a:lnSpc>
+              <a:spcBef>
+                <a:spcPts val="0"/>
+              </a:spcBef>
+              <a:spcAft>
+                <a:spcPts val="0"/>
+              </a:spcAft>
+              <a:buClrTx/>
+              <a:buSzTx/>
+              <a:buFontTx/>
+              <a:buNone/>
+              <a:tabLst/>
+              <a:defRPr/>
+            </a:pPr>
+            <a:r>
+              <a:rPr lang="it-IT" dirty="0"/>
+              <a:t>Questa fase serve per osservare come cambiano distribuzioni di intensità, contrasto visivo e rappresentazione della lesione nelle varie modalità.</a:t>
+            </a:r>
+          </a:p>
+          <a:p>
+            <a:r>
+              <a:rPr lang="it-IT" dirty="0"/>
+              <a:t>In particolare, vengono confrontate le sequenze originali e i relativi istogrammi delle intensità all’interno della ROI cerebrale.</a:t>
+            </a:r>
           </a:p>
         </p:txBody>
       </p:sp>
@@ -674,7 +734,48 @@
           <a:bodyPr/>
           <a:lstStyle/>
           <a:p>
-            <a:endParaRPr lang="it-IT" dirty="0"/>
+            <a:r>
+              <a:rPr lang="it-IT" dirty="0"/>
+              <a:t>Inoltre, è stato testato il miglioramento del contrasto con CLAHE (</a:t>
+            </a:r>
+            <a:r>
+              <a:rPr lang="it-IT" dirty="0" err="1"/>
+              <a:t>Contrast</a:t>
+            </a:r>
+            <a:r>
+              <a:rPr lang="it-IT" dirty="0"/>
+              <a:t> Limited </a:t>
+            </a:r>
+            <a:r>
+              <a:rPr lang="it-IT" dirty="0" err="1"/>
+              <a:t>Adaptive</a:t>
+            </a:r>
+            <a:r>
+              <a:rPr lang="it-IT" dirty="0"/>
+              <a:t> </a:t>
+            </a:r>
+            <a:r>
+              <a:rPr lang="it-IT" dirty="0" err="1"/>
+              <a:t>Histogram</a:t>
+            </a:r>
+            <a:r>
+              <a:rPr lang="it-IT" dirty="0"/>
+              <a:t> </a:t>
+            </a:r>
+            <a:r>
+              <a:rPr lang="it-IT" dirty="0" err="1"/>
+              <a:t>Equalization</a:t>
+            </a:r>
+            <a:r>
+              <a:rPr lang="it-IT" dirty="0"/>
+              <a:t>) per verificare se potesse favorire la segmentazione.</a:t>
+            </a:r>
+          </a:p>
+          <a:p>
+            <a:r>
+              <a:rPr lang="it-IT" dirty="0"/>
+              <a:t>Visivamente il contrasto migliora e gli istogrammi risultano più distribuiti, ma sperimentalmente questo passaggio ha introdotto artefatti che peggioravano la segmentazione, quindi non è stato incluso nella pipeline finale. </a:t>
+            </a:r>
           </a:p>
         </p:txBody>
       </p:sp>
@@ -782,7 +883,10 @@
           <a:bodyPr/>
           <a:lstStyle/>
           <a:p>
-            <a:endParaRPr lang="it-IT" dirty="0"/>
+            <a:r>
+              <a:rPr lang="it-IT" dirty="0"/>
+              <a:t>Nella stessa fase è stato rappresentato il volume in 3D per comprendere meglio la reale localizzazione e l’estensione della lesione.</a:t>
+            </a:r>
           </a:p>
         </p:txBody>
       </p:sp>
@@ -890,7 +994,16 @@
           <a:bodyPr/>
           <a:lstStyle/>
           <a:p>
-            <a:endParaRPr lang="it-IT" dirty="0"/>
+            <a:r>
+              <a:rPr lang="it-IT" dirty="0"/>
+              <a:t>La pipeline lavora in 2D, quindi per ogni paziente viene selezionata automaticamente la slice più significativa.</a:t>
+            </a:r>
+          </a:p>
+          <a:p>
+            <a:r>
+              <a:rPr lang="it-IT" dirty="0"/>
+              <a:t>Il criterio consiste nello scegliere la slice con massima estensione tumorale nella ground truth, portando il problema da 3D a 2D.</a:t>
+            </a:r>
           </a:p>
         </p:txBody>
       </p:sp>
@@ -998,7 +1111,16 @@
           <a:bodyPr/>
           <a:lstStyle/>
           <a:p>
-            <a:endParaRPr lang="it-IT" dirty="0"/>
+            <a:r>
+              <a:rPr lang="it-IT" dirty="0"/>
+              <a:t>Dopo aver selezionato la slice, si applica una normalizzazione Z-score all’interno della ROI cerebrale per rendere confrontabili le intensità tra pazienti e tra sequenze, riducendo la variabilità globale non informativa.</a:t>
+            </a:r>
+          </a:p>
+          <a:p>
+            <a:r>
+              <a:rPr lang="it-IT" dirty="0"/>
+              <a:t>I pixel fuori dalla ROI vengono azzerati e infine l’immagine viene rimappata nell’intervallo [0,1].</a:t>
+            </a:r>
           </a:p>
         </p:txBody>
       </p:sp>
@@ -1106,7 +1228,16 @@
           <a:bodyPr/>
           <a:lstStyle/>
           <a:p>
-            <a:endParaRPr lang="it-IT" dirty="0"/>
+            <a:r>
+              <a:rPr lang="it-IT" dirty="0"/>
+              <a:t>Successivamente viene applicato un filtro mediano 3x3.</a:t>
+            </a:r>
+          </a:p>
+          <a:p>
+            <a:r>
+              <a:rPr lang="it-IT" dirty="0"/>
+              <a:t>Il filtro mediano è un filtro non lineare che riduce il rumore locale preservando meglio i bordi rispetto a un filtraggio medio lineare. In un problema come questo è importante non sfumare eccessivamente i contorni della lesione, perché i passaggi successivi dipendono molto dalla distribuzione locale delle intensità.</a:t>
+            </a:r>
           </a:p>
         </p:txBody>
       </p:sp>
@@ -1214,7 +1345,10 @@
           <a:bodyPr/>
           <a:lstStyle/>
           <a:p>
-            <a:endParaRPr lang="it-IT" dirty="0"/>
+            <a:r>
+              <a:rPr lang="it-IT" dirty="0"/>
+              <a:t>In questa fase vengono costruite due rappresentazioni multimodali. Fusion2 combina FLAIR e T1c, mentre Fusion3 combina FLAIR, T1c e T2 con pesi scelti empiricamente, dando maggiore importanza a FLAIR perché rappresenta meglio l’estensione complessiva della lesione, utile in questo contesto di segmentazione binaria. Lo scopo della fusione è integrare informazioni complementari, ovvero FLAIR per estensione ed edema, T1c per componente attiva, T2 per localizzazione patologica e contenuto acquoso.</a:t>
+            </a:r>
           </a:p>
         </p:txBody>
       </p:sp>
@@ -1322,7 +1456,70 @@
           <a:bodyPr/>
           <a:lstStyle/>
           <a:p>
-            <a:endParaRPr lang="it-IT" dirty="0"/>
+            <a:r>
+              <a:rPr lang="it-IT" dirty="0"/>
+              <a:t>Dalla Fusion3 si costruisce la </a:t>
+            </a:r>
+            <a:r>
+              <a:rPr lang="it-IT" dirty="0" err="1"/>
+              <a:t>seed</a:t>
+            </a:r>
+            <a:r>
+              <a:rPr lang="it-IT" dirty="0"/>
+              <a:t> </a:t>
+            </a:r>
+            <a:r>
+              <a:rPr lang="it-IT" dirty="0" err="1"/>
+              <a:t>map</a:t>
+            </a:r>
+            <a:r>
+              <a:rPr lang="it-IT" dirty="0"/>
+              <a:t> applicando una sfocatura gaussiana con sigma uguale a 3, scelto sperimentalmente come descritto nel report, graficando l’andamento del Dice Score al variare del parametro.</a:t>
+            </a:r>
+          </a:p>
+          <a:p>
+            <a:r>
+              <a:rPr lang="it-IT" dirty="0"/>
+              <a:t>L’obiettivo è individuare una mappa di possibili semi iniziali da cui far partire il </a:t>
+            </a:r>
+            <a:r>
+              <a:rPr lang="it-IT" dirty="0" err="1"/>
+              <a:t>Region</a:t>
+            </a:r>
+            <a:r>
+              <a:rPr lang="it-IT" dirty="0"/>
+              <a:t> </a:t>
+            </a:r>
+            <a:r>
+              <a:rPr lang="it-IT" dirty="0" err="1"/>
+              <a:t>Growing</a:t>
+            </a:r>
+            <a:r>
+              <a:rPr lang="it-IT" dirty="0"/>
+              <a:t>. In pratica, la sfocatura smussa le variazioni locali e mette in evidenza la zona globalmente più intensa.</a:t>
+            </a:r>
+          </a:p>
+          <a:p>
+            <a:r>
+              <a:rPr lang="it-IT" dirty="0"/>
+              <a:t>Il seme iniziale viene poi scelto come massimo della </a:t>
+            </a:r>
+            <a:r>
+              <a:rPr lang="it-IT" dirty="0" err="1"/>
+              <a:t>seed</a:t>
+            </a:r>
+            <a:r>
+              <a:rPr lang="it-IT" dirty="0"/>
+              <a:t> </a:t>
+            </a:r>
+            <a:r>
+              <a:rPr lang="it-IT" dirty="0" err="1"/>
+              <a:t>map</a:t>
+            </a:r>
+            <a:r>
+              <a:rPr lang="it-IT" dirty="0"/>
+              <a:t>.</a:t>
+            </a:r>
           </a:p>
         </p:txBody>
       </p:sp>
@@ -1430,7 +1627,38 @@
           <a:bodyPr/>
           <a:lstStyle/>
           <a:p>
-            <a:endParaRPr lang="it-IT" dirty="0"/>
+            <a:r>
+              <a:rPr lang="it-IT" dirty="0"/>
+              <a:t>Il primo passo è la </a:t>
+            </a:r>
+            <a:r>
+              <a:rPr lang="it-IT" dirty="0" err="1"/>
+              <a:t>sogliatura</a:t>
+            </a:r>
+            <a:r>
+              <a:rPr lang="it-IT" dirty="0"/>
+              <a:t> multilivello basata sul metodo di Otsu. In particolare sono usate due soglie, quindi l’immagine è divisa in tre classi di intensità e viene selezionata la classe a intensità più alta.</a:t>
+            </a:r>
+          </a:p>
+          <a:p>
+            <a:r>
+              <a:rPr lang="it-IT" dirty="0"/>
+              <a:t>Questo processo fornisce una prima maschera delle regioni candidate e i marker da utilizzare per limitare il </a:t>
+            </a:r>
+            <a:r>
+              <a:rPr lang="it-IT" dirty="0" err="1"/>
+              <a:t>Watershed</a:t>
+            </a:r>
+            <a:r>
+              <a:rPr lang="it-IT" dirty="0"/>
+              <a:t>.</a:t>
+            </a:r>
+          </a:p>
+          <a:p>
+            <a:r>
+              <a:rPr lang="it-IT" dirty="0"/>
+              <a:t>Otsu individua automaticamente tali zone massimizzando la separazione inter-classe e minimizzando quella intra-classe iterativamente nell’istogramma.</a:t>
+            </a:r>
           </a:p>
         </p:txBody>
       </p:sp>
@@ -1538,6 +1766,78 @@
           <a:bodyPr/>
           <a:lstStyle/>
           <a:p>
+            <a:r>
+              <a:rPr lang="it-IT" dirty="0"/>
+              <a:t>A partire dal seme automatico estratto dalla </a:t>
+            </a:r>
+            <a:r>
+              <a:rPr lang="it-IT" dirty="0" err="1"/>
+              <a:t>seed</a:t>
+            </a:r>
+            <a:r>
+              <a:rPr lang="it-IT" dirty="0"/>
+              <a:t> </a:t>
+            </a:r>
+            <a:r>
+              <a:rPr lang="it-IT" dirty="0" err="1"/>
+              <a:t>map</a:t>
+            </a:r>
+            <a:r>
+              <a:rPr lang="it-IT" dirty="0"/>
+              <a:t> viene applicato un </a:t>
+            </a:r>
+            <a:r>
+              <a:rPr lang="it-IT" dirty="0" err="1"/>
+              <a:t>Region</a:t>
+            </a:r>
+            <a:r>
+              <a:rPr lang="it-IT" dirty="0"/>
+              <a:t> </a:t>
+            </a:r>
+            <a:r>
+              <a:rPr lang="it-IT" dirty="0" err="1"/>
+              <a:t>Growing</a:t>
+            </a:r>
+            <a:r>
+              <a:rPr lang="it-IT" dirty="0"/>
+              <a:t> con connettività a 8 vicini di adiacenza.</a:t>
+            </a:r>
+          </a:p>
+          <a:p>
+            <a:r>
+              <a:rPr lang="it-IT" dirty="0"/>
+              <a:t>La crescita non usa una soglia fissa, ma una soglia dinamica calcolata come sesto percentile delle intensità dei pixel appartenenti alla maschera di Otsu.</a:t>
+            </a:r>
+          </a:p>
+          <a:p>
+            <a:r>
+              <a:rPr lang="it-IT" dirty="0"/>
+              <a:t>Questa scelta rende il criterio più robusto al singolo paziente, perché la soglia dipende dalla distribuzione effettiva delle intensità nella regione candidata. </a:t>
+            </a:r>
+          </a:p>
+          <a:p>
+            <a:r>
+              <a:rPr lang="it-IT" dirty="0"/>
+              <a:t>Il </a:t>
+            </a:r>
+            <a:r>
+              <a:rPr lang="it-IT" dirty="0" err="1"/>
+              <a:t>Region</a:t>
+            </a:r>
+            <a:r>
+              <a:rPr lang="it-IT" dirty="0"/>
+              <a:t> </a:t>
+            </a:r>
+            <a:r>
+              <a:rPr lang="it-IT" dirty="0" err="1"/>
+              <a:t>Growing</a:t>
+            </a:r>
+            <a:r>
+              <a:rPr lang="it-IT" dirty="0"/>
+              <a:t> viene eseguito espandendo la regione a partire dal seme e, una volta terminato, viene selezionata la componente connessa più pertinente, riducendo la frammentazione e limitando le regioni spurie.</a:t>
+            </a:r>
+          </a:p>
+          <a:p>
             <a:endParaRPr lang="it-IT" dirty="0"/>
           </a:p>
         </p:txBody>
@@ -1628,7 +1928,16 @@
           <a:bodyPr/>
           <a:lstStyle/>
           <a:p>
-            <a:endParaRPr lang="it-IT" dirty="0"/>
+            <a:r>
+              <a:rPr lang="it-IT" dirty="0"/>
+              <a:t>Il problema di partenza è che la segmentazione manuale dei tumori cerebrali è un processo lento, soggettivo e variabile. Inoltre, i gliomi possono presentare bordi sfumati e basso contrasto, complicando l’identificazione dell’area tumorale.</a:t>
+            </a:r>
+          </a:p>
+          <a:p>
+            <a:r>
+              <a:rPr lang="it-IT" dirty="0"/>
+              <a:t>Per tale motivo è stata sviluppata una pipeline automatica in MATLAB per segmentare in modo binario il tessuto sano e la lesione tumorale in immagini bidimensionali.</a:t>
+            </a:r>
           </a:p>
         </p:txBody>
       </p:sp>
@@ -1730,7 +2039,70 @@
           <a:bodyPr/>
           <a:lstStyle/>
           <a:p>
-            <a:endParaRPr lang="it-IT" dirty="0"/>
+            <a:r>
+              <a:rPr lang="it-IT" dirty="0"/>
+              <a:t>Dopo il </a:t>
+            </a:r>
+            <a:r>
+              <a:rPr lang="it-IT" dirty="0" err="1"/>
+              <a:t>Region</a:t>
+            </a:r>
+            <a:r>
+              <a:rPr lang="it-IT" dirty="0"/>
+              <a:t> </a:t>
+            </a:r>
+            <a:r>
+              <a:rPr lang="it-IT" dirty="0" err="1"/>
+              <a:t>Growing</a:t>
+            </a:r>
+            <a:r>
+              <a:rPr lang="it-IT" dirty="0"/>
+              <a:t> viene applicato un Marker-</a:t>
+            </a:r>
+            <a:r>
+              <a:rPr lang="it-IT" dirty="0" err="1"/>
+              <a:t>Controlled</a:t>
+            </a:r>
+            <a:r>
+              <a:rPr lang="it-IT" dirty="0"/>
+              <a:t> </a:t>
+            </a:r>
+            <a:r>
+              <a:rPr lang="it-IT" dirty="0" err="1"/>
+              <a:t>Watershed</a:t>
+            </a:r>
+            <a:r>
+              <a:rPr lang="it-IT" dirty="0"/>
+              <a:t> per rifinire il contorno della regione ottenuta.</a:t>
+            </a:r>
+          </a:p>
+          <a:p>
+            <a:r>
+              <a:rPr lang="it-IT" dirty="0"/>
+              <a:t>La superficie topografica è costruita a partire dalla maschera del </a:t>
+            </a:r>
+            <a:r>
+              <a:rPr lang="it-IT" dirty="0" err="1"/>
+              <a:t>Region</a:t>
+            </a:r>
+            <a:r>
+              <a:rPr lang="it-IT" dirty="0"/>
+              <a:t> </a:t>
+            </a:r>
+            <a:r>
+              <a:rPr lang="it-IT" dirty="0" err="1"/>
+              <a:t>Growing</a:t>
+            </a:r>
+            <a:r>
+              <a:rPr lang="it-IT" dirty="0"/>
+              <a:t> mediante la trasformata di distanza inversa, mentre i marker imposti derivano dalla maschera iniziale di Otsu.</a:t>
+            </a:r>
+          </a:p>
+          <a:p>
+            <a:r>
+              <a:rPr lang="it-IT" dirty="0"/>
+              <a:t>Viene dunque ottenuta una maschera finale rifinita rispetto alle precedenti, che sarà sottoposta a una fase di post-processing.</a:t>
+            </a:r>
           </a:p>
         </p:txBody>
       </p:sp>
@@ -1777,6 +2149,111 @@
 </file>
 
 <file path=ppt/notesSlides/notesSlide21.xml><?xml version="1.0" encoding="utf-8"?>
+<p:notes xmlns:a="http://schemas.openxmlformats.org/drawingml/2006/main" xmlns:r="http://schemas.openxmlformats.org/officeDocument/2006/relationships" xmlns:p="http://schemas.openxmlformats.org/presentationml/2006/main">
+  <p:cSld>
+    <p:spTree>
+      <p:nvGrpSpPr>
+        <p:cNvPr id="1" name=""/>
+        <p:cNvGrpSpPr/>
+        <p:nvPr/>
+      </p:nvGrpSpPr>
+      <p:grpSpPr>
+        <a:xfrm>
+          <a:off x="0" y="0"/>
+          <a:ext cx="0" cy="0"/>
+          <a:chOff x="0" y="0"/>
+          <a:chExt cx="0" cy="0"/>
+        </a:xfrm>
+      </p:grpSpPr>
+      <p:sp>
+        <p:nvSpPr>
+          <p:cNvPr id="2" name="Segnaposto immagine diapositiva 1"/>
+          <p:cNvSpPr>
+            <a:spLocks noGrp="1" noRot="1" noChangeAspect="1"/>
+          </p:cNvSpPr>
+          <p:nvPr>
+            <p:ph type="sldImg"/>
+          </p:nvPr>
+        </p:nvSpPr>
+        <p:spPr/>
+      </p:sp>
+      <p:sp>
+        <p:nvSpPr>
+          <p:cNvPr id="3" name="Segnaposto note 2"/>
+          <p:cNvSpPr>
+            <a:spLocks noGrp="1"/>
+          </p:cNvSpPr>
+          <p:nvPr>
+            <p:ph type="body" idx="1"/>
+          </p:nvPr>
+        </p:nvSpPr>
+        <p:spPr/>
+        <p:txBody>
+          <a:bodyPr/>
+          <a:lstStyle/>
+          <a:p>
+            <a:r>
+              <a:rPr lang="it-IT" dirty="0"/>
+              <a:t>Dopo la segmentazione, il post-processing morfologico consente di rifinire la maschera ottenuta.</a:t>
+            </a:r>
+          </a:p>
+          <a:p>
+            <a:r>
+              <a:rPr lang="it-IT" dirty="0"/>
+              <a:t>In particolare, viene eseguita la chiusura morfologica con elemento strutturante circolare di raggio 3, che serve a regolarizzare i bordi e a chiudere piccole discontinuità nel contorno della lesione.</a:t>
+            </a:r>
+          </a:p>
+          <a:p>
+            <a:r>
+              <a:rPr lang="it-IT" dirty="0"/>
+              <a:t>La seconda è il riempimento delle cavità interne, utile per eliminare piccoli buchi presenti nella maschera segmentata.</a:t>
+            </a:r>
+          </a:p>
+          <a:p>
+            <a:r>
+              <a:rPr lang="it-IT" dirty="0"/>
+              <a:t>La terza è la selezione della componente connessa principale, che consente eventualmente di mantenere solo la regione di area maggiore.</a:t>
+            </a:r>
+          </a:p>
+        </p:txBody>
+      </p:sp>
+      <p:sp>
+        <p:nvSpPr>
+          <p:cNvPr id="4" name="Segnaposto numero diapositiva 3"/>
+          <p:cNvSpPr>
+            <a:spLocks noGrp="1"/>
+          </p:cNvSpPr>
+          <p:nvPr>
+            <p:ph type="sldNum" sz="quarter" idx="5"/>
+          </p:nvPr>
+        </p:nvSpPr>
+        <p:spPr/>
+        <p:txBody>
+          <a:bodyPr/>
+          <a:lstStyle/>
+          <a:p>
+            <a:fld id="{08C9A3EF-1CD3-4928-B014-184E8B8B8430}" type="slidenum">
+              <a:rPr lang="it-IT" smtClean="0"/>
+              <a:t>21</a:t>
+            </a:fld>
+            <a:endParaRPr lang="it-IT"/>
+          </a:p>
+        </p:txBody>
+      </p:sp>
+    </p:spTree>
+    <p:extLst>
+      <p:ext uri="{BB962C8B-B14F-4D97-AF65-F5344CB8AC3E}">
+        <p14:creationId xmlns:p14="http://schemas.microsoft.com/office/powerpoint/2010/main" val="1272113418"/>
+      </p:ext>
+    </p:extLst>
+  </p:cSld>
+  <p:clrMapOvr>
+    <a:masterClrMapping/>
+  </p:clrMapOvr>
+</p:notes>
+</file>
+
+<file path=ppt/notesSlides/notesSlide22.xml><?xml version="1.0" encoding="utf-8"?>
 <p:notes xmlns:a="http://schemas.openxmlformats.org/drawingml/2006/main" xmlns:r="http://schemas.openxmlformats.org/officeDocument/2006/relationships" xmlns:p="http://schemas.openxmlformats.org/presentationml/2006/main">
   <p:cSld>
     <p:spTree>
@@ -1838,7 +2315,28 @@
           <a:bodyPr/>
           <a:lstStyle/>
           <a:p>
-            <a:endParaRPr lang="it-IT" dirty="0"/>
+            <a:r>
+              <a:rPr lang="it-IT" dirty="0"/>
+              <a:t>I risultati numerici sono stati ottenuti valutando i TP, FP ed FN e combinandoli con le definizioni delle metriche Dice Score, Sensitivity, Precision.</a:t>
+            </a:r>
+          </a:p>
+          <a:p>
+            <a:r>
+              <a:rPr lang="it-IT" dirty="0"/>
+              <a:t>Il Dice Score misura la sovrapposizione tra la segmentazione e la ground truth in maniera affidabile, in quanto valuta tutte le tipologie di predizioni. La sensibilità indica quanto è abile la pipeline nell’individuare i casi positivi tra tutti i positivi reali, mentre la Precision misura la capacità di riconoscere i casi positivi tra tutti quelli individuati.</a:t>
+            </a:r>
+          </a:p>
+          <a:p>
+            <a:r>
+              <a:rPr lang="it-IT" dirty="0"/>
+              <a:t>Su tutto il dataset, la configurazione migliore è Fusion3, con Dice medio pari a 0.806, Sensitivity 0.744 e Precision 0.935.</a:t>
+            </a:r>
+          </a:p>
+          <a:p>
+            <a:r>
+              <a:rPr lang="it-IT" dirty="0"/>
+              <a:t>FLAIR è la migliore modalità singola, con prestazioni buone soprattutto in termini di estensione rilevata, mentre T1c, pur avendo una precisione elevata, risulta spesso incompleta, perché tende a catturare la sola parte attiva della lesione e non la sua estensione complessiva.</a:t>
+            </a:r>
           </a:p>
         </p:txBody>
       </p:sp>
@@ -1884,7 +2382,7 @@
 </p:notes>
 </file>
 
-<file path=ppt/notesSlides/notesSlide22.xml><?xml version="1.0" encoding="utf-8"?>
+<file path=ppt/notesSlides/notesSlide23.xml><?xml version="1.0" encoding="utf-8"?>
 <p:notes xmlns:a="http://schemas.openxmlformats.org/drawingml/2006/main" xmlns:r="http://schemas.openxmlformats.org/officeDocument/2006/relationships" xmlns:p="http://schemas.openxmlformats.org/presentationml/2006/main">
   <p:cSld>
     <p:spTree>
@@ -1946,7 +2444,16 @@
           <a:bodyPr/>
           <a:lstStyle/>
           <a:p>
-            <a:endParaRPr lang="it-IT" dirty="0"/>
+            <a:r>
+              <a:rPr lang="it-IT" dirty="0"/>
+              <a:t>Oltre alle metriche aggregate, sono stati analizzati anche i casi più rappresentativi per capire quando la multimodalità aiuta davvero e quando invece la pipeline va in difficoltà.</a:t>
+            </a:r>
+          </a:p>
+          <a:p>
+            <a:r>
+              <a:rPr lang="it-IT" dirty="0"/>
+              <a:t>Questo è importante perché i valori medi non sono gli unici da considerare, in quanto esistono casi molto buoni, ma anche pazienti in cui la pipeline fallisce.</a:t>
+            </a:r>
           </a:p>
         </p:txBody>
       </p:sp>
@@ -1992,7 +2499,7 @@
 </p:notes>
 </file>
 
-<file path=ppt/notesSlides/notesSlide23.xml><?xml version="1.0" encoding="utf-8"?>
+<file path=ppt/notesSlides/notesSlide24.xml><?xml version="1.0" encoding="utf-8"?>
 <p:notes xmlns:a="http://schemas.openxmlformats.org/drawingml/2006/main" xmlns:r="http://schemas.openxmlformats.org/officeDocument/2006/relationships" xmlns:p="http://schemas.openxmlformats.org/presentationml/2006/main">
   <p:cSld>
     <p:spTree>
@@ -2054,7 +2561,28 @@
           <a:bodyPr/>
           <a:lstStyle/>
           <a:p>
-            <a:endParaRPr lang="it-IT" dirty="0"/>
+            <a:r>
+              <a:rPr lang="it-IT" dirty="0"/>
+              <a:t>Nei casi migliori, come BRATS_128 e BRATS_248, si osservano due situazioni interessanti.</a:t>
+            </a:r>
+          </a:p>
+          <a:p>
+            <a:r>
+              <a:rPr lang="it-IT" dirty="0"/>
+              <a:t>Nel primo caso, Fusion3 beneficia delle informazioni multimodali e ottiene il miglior Dice Score.</a:t>
+            </a:r>
+          </a:p>
+          <a:p>
+            <a:r>
+              <a:rPr lang="it-IT" dirty="0"/>
+              <a:t>Nel secondo, invece, FLAIR da sola è già molto informativa e la fusione mantiene comunque un risultato elevato.</a:t>
+            </a:r>
+          </a:p>
+          <a:p>
+            <a:r>
+              <a:rPr lang="it-IT" dirty="0"/>
+              <a:t>Questo mostra che la multimodalità può essere utile, ma quando una singola modalità è già molto rappresentativa, il guadagno aggiuntivo è più contenuto.</a:t>
+            </a:r>
           </a:p>
         </p:txBody>
       </p:sp>
@@ -2100,7 +2628,7 @@
 </p:notes>
 </file>
 
-<file path=ppt/notesSlides/notesSlide24.xml><?xml version="1.0" encoding="utf-8"?>
+<file path=ppt/notesSlides/notesSlide25.xml><?xml version="1.0" encoding="utf-8"?>
 <p:notes xmlns:a="http://schemas.openxmlformats.org/drawingml/2006/main" xmlns:r="http://schemas.openxmlformats.org/officeDocument/2006/relationships" xmlns:p="http://schemas.openxmlformats.org/presentationml/2006/main">
   <p:cSld>
     <p:spTree>
@@ -2162,7 +2690,22 @@
           <a:bodyPr/>
           <a:lstStyle/>
           <a:p>
-            <a:endParaRPr lang="it-IT" dirty="0"/>
+            <a:r>
+              <a:rPr lang="it-IT" dirty="0"/>
+              <a:t>Nei casi peggiori emergono i limiti della pipeline. In BRATS_140, ad esempio, Fusion2 fornisce un risultato discretamente utile mentre Fusion3 fallisce, segno che l’aggiunta di una modalità non sempre migliora la rappresentazione.</a:t>
+            </a:r>
+          </a:p>
+          <a:p>
+            <a:r>
+              <a:rPr lang="it-IT" dirty="0"/>
+              <a:t>In BRATS_380 si osserva invece un fallimento completo in tutte le configurazioni.</a:t>
+            </a:r>
+          </a:p>
+          <a:p>
+            <a:r>
+              <a:rPr lang="it-IT" dirty="0"/>
+              <a:t>Questo conferma che l’approccio è sensibile a lesioni poco contrastate, poco compatte o non ben rappresentate dalle modalità considerate.</a:t>
+            </a:r>
           </a:p>
         </p:txBody>
       </p:sp>
@@ -2208,7 +2751,7 @@
 </p:notes>
 </file>
 
-<file path=ppt/notesSlides/notesSlide25.xml><?xml version="1.0" encoding="utf-8"?>
+<file path=ppt/notesSlides/notesSlide26.xml><?xml version="1.0" encoding="utf-8"?>
 <p:notes xmlns:a="http://schemas.openxmlformats.org/drawingml/2006/main" xmlns:r="http://schemas.openxmlformats.org/officeDocument/2006/relationships" xmlns:p="http://schemas.openxmlformats.org/presentationml/2006/main">
   <p:cSld>
     <p:spTree>
@@ -2270,7 +2813,22 @@
           <a:bodyPr/>
           <a:lstStyle/>
           <a:p>
-            <a:endParaRPr lang="it-IT" dirty="0"/>
+            <a:r>
+              <a:rPr lang="it-IT" dirty="0"/>
+              <a:t>In conclusione, il progetto mostra che Fusion3 è la configurazione con le migliori prestazioni medie complessive, mentre FLAIR è la sequenza singola più informativa.</a:t>
+            </a:r>
+          </a:p>
+          <a:p>
+            <a:r>
+              <a:rPr lang="it-IT" dirty="0"/>
+              <a:t>L’integrazione multimodale migliora mediamente la segmentazione, ma resta soggetta a fallimenti in casi critici.</a:t>
+            </a:r>
+          </a:p>
+          <a:p>
+            <a:r>
+              <a:rPr lang="it-IT" dirty="0"/>
+              <a:t>Il lavoro conferma anche che tecniche classiche di Image Processing, se ben combinate e interpretate, possono ancora fornire risultati significativi in un problema complesso, pur senza la flessibilità dei metodi di Deep Learning.</a:t>
+            </a:r>
           </a:p>
         </p:txBody>
       </p:sp>
@@ -2316,7 +2874,7 @@
 </p:notes>
 </file>
 
-<file path=ppt/notesSlides/notesSlide26.xml><?xml version="1.0" encoding="utf-8"?>
+<file path=ppt/notesSlides/notesSlide27.xml><?xml version="1.0" encoding="utf-8"?>
 <p:notes xmlns:a="http://schemas.openxmlformats.org/drawingml/2006/main" xmlns:r="http://schemas.openxmlformats.org/officeDocument/2006/relationships" xmlns:p="http://schemas.openxmlformats.org/presentationml/2006/main">
   <p:cSld>
     <p:spTree>
@@ -2378,7 +2936,30 @@
           <a:bodyPr/>
           <a:lstStyle/>
           <a:p>
-            <a:endParaRPr lang="it-IT" dirty="0"/>
+            <a:r>
+              <a:rPr lang="it-IT" dirty="0"/>
+              <a:t>Come sviluppi futuri si potrebbe estendere la pipeline 2D a una 3D, in modo da sfruttare la continuità volumetrica della lesione.</a:t>
+            </a:r>
+          </a:p>
+          <a:p>
+            <a:r>
+              <a:rPr lang="it-IT" dirty="0"/>
+              <a:t>Un secondo sviluppo riguarda strategie di fusione multimodale più avanzate rispetto alla combinazione lineare pesata.</a:t>
+            </a:r>
+          </a:p>
+          <a:p>
+            <a:r>
+              <a:rPr lang="it-IT" dirty="0"/>
+              <a:t>Inoltre sarebbe interessante confrontare questa pipeline con altri approcci classici, come K-Means o metodi </a:t>
+            </a:r>
+            <a:r>
+              <a:rPr lang="it-IT" dirty="0" err="1"/>
+              <a:t>edge-based</a:t>
+            </a:r>
+            <a:r>
+              <a:rPr lang="it-IT" dirty="0"/>
+              <a:t>, e infine integrare il confronto con tecniche di Machine Learning e Deep Learning.</a:t>
+            </a:r>
           </a:p>
         </p:txBody>
       </p:sp>
@@ -2424,7 +3005,7 @@
 </p:notes>
 </file>
 
-<file path=ppt/notesSlides/notesSlide27.xml><?xml version="1.0" encoding="utf-8"?>
+<file path=ppt/notesSlides/notesSlide28.xml><?xml version="1.0" encoding="utf-8"?>
 <p:notes xmlns:a="http://schemas.openxmlformats.org/drawingml/2006/main" xmlns:r="http://schemas.openxmlformats.org/officeDocument/2006/relationships" xmlns:p="http://schemas.openxmlformats.org/presentationml/2006/main">
   <p:cSld>
     <p:spTree>
@@ -2552,7 +3133,30 @@
           <a:bodyPr/>
           <a:lstStyle/>
           <a:p>
-            <a:endParaRPr lang="it-IT" dirty="0"/>
+            <a:r>
+              <a:rPr lang="it-IT" dirty="0"/>
+              <a:t>Il primo obiettivo del progetto è implementare in MATLAB una pipeline automatica di segmentazione binaria 2D dei tumori cerebrali, utilizzando tecniche tradizionali di Image Processing anziché modelli di Machine Learning e Deep Learning.</a:t>
+            </a:r>
+          </a:p>
+          <a:p>
+            <a:r>
+              <a:rPr lang="it-IT" dirty="0"/>
+              <a:t>Il secondo è confrontare approcci </a:t>
+            </a:r>
+            <a:r>
+              <a:rPr lang="it-IT" dirty="0" err="1"/>
+              <a:t>monomodali</a:t>
+            </a:r>
+            <a:r>
+              <a:rPr lang="it-IT" dirty="0"/>
+              <a:t> e multimodali, valutando eventuali miglioramenti nella segmentazione.</a:t>
+            </a:r>
+          </a:p>
+          <a:p>
+            <a:r>
+              <a:rPr lang="it-IT" dirty="0"/>
+              <a:t>Il terzo obiettivo è valutare quantitativamente l’impatto delle diverse configurazioni di input, attraverso metriche come Dice Score, Sensitivity e Precision.</a:t>
+            </a:r>
           </a:p>
         </p:txBody>
       </p:sp>
@@ -2654,6 +3258,84 @@
           <a:bodyPr/>
           <a:lstStyle/>
           <a:p>
+            <a:pPr marL="0" marR="0" lvl="0" indent="0" algn="l" defTabSz="914400" rtl="0" eaLnBrk="1" fontAlgn="auto" latinLnBrk="0" hangingPunct="1">
+              <a:lnSpc>
+                <a:spcPct val="100000"/>
+              </a:lnSpc>
+              <a:spcBef>
+                <a:spcPts val="0"/>
+              </a:spcBef>
+              <a:spcAft>
+                <a:spcPts val="0"/>
+              </a:spcAft>
+              <a:buClrTx/>
+              <a:buSzTx/>
+              <a:buFontTx/>
+              <a:buNone/>
+              <a:tabLst/>
+              <a:defRPr/>
+            </a:pPr>
+            <a:r>
+              <a:rPr lang="it-IT" dirty="0"/>
+              <a:t>Per l’analisi è stato usato il dataset </a:t>
+            </a:r>
+            <a:r>
+              <a:rPr lang="it-IT" dirty="0" err="1"/>
+              <a:t>BraTS</a:t>
+            </a:r>
+            <a:r>
+              <a:rPr lang="it-IT" dirty="0"/>
+              <a:t> della </a:t>
+            </a:r>
+            <a:r>
+              <a:rPr lang="it-IT" dirty="0" err="1"/>
+              <a:t>Medical</a:t>
+            </a:r>
+            <a:r>
+              <a:rPr lang="it-IT" dirty="0"/>
+              <a:t> </a:t>
+            </a:r>
+            <a:r>
+              <a:rPr lang="it-IT" dirty="0" err="1"/>
+              <a:t>Segmentation</a:t>
+            </a:r>
+            <a:r>
+              <a:rPr lang="it-IT" dirty="0"/>
+              <a:t> Decathlon, in particolare il task Brain </a:t>
+            </a:r>
+            <a:r>
+              <a:rPr lang="it-IT" dirty="0" err="1"/>
+              <a:t>Tumor</a:t>
+            </a:r>
+            <a:r>
+              <a:rPr lang="it-IT" dirty="0"/>
+              <a:t>, che è un riferimento standard per la segmentazione di tumori cerebrali. Sono stati utilizzati esclusivamente i dati annotati del training set, cioè i volumi MRI e le ground truth manuali, in modo da poter confrontare direttamente i risultati della pipeline con le label dei medici.</a:t>
+            </a:r>
+          </a:p>
+          <a:p>
+            <a:pPr marL="0" marR="0" lvl="0" indent="0" algn="l" defTabSz="914400" rtl="0" eaLnBrk="1" fontAlgn="auto" latinLnBrk="0" hangingPunct="1">
+              <a:lnSpc>
+                <a:spcPct val="100000"/>
+              </a:lnSpc>
+              <a:spcBef>
+                <a:spcPts val="0"/>
+              </a:spcBef>
+              <a:spcAft>
+                <a:spcPts val="0"/>
+              </a:spcAft>
+              <a:buClrTx/>
+              <a:buSzTx/>
+              <a:buFontTx/>
+              <a:buNone/>
+              <a:tabLst/>
+              <a:defRPr/>
+            </a:pPr>
+            <a:r>
+              <a:rPr lang="it-IT" dirty="0"/>
+              <a:t>Il dataset comprende 484 pazienti, ciascuno con quattro sequenze MRI e relativa maschera target.</a:t>
+            </a:r>
+          </a:p>
+          <a:p>
             <a:endParaRPr lang="it-IT" dirty="0"/>
           </a:p>
         </p:txBody>
@@ -2762,7 +3444,58 @@
           <a:bodyPr/>
           <a:lstStyle/>
           <a:p>
-            <a:endParaRPr lang="it-IT" dirty="0"/>
+            <a:pPr marL="0" marR="0" lvl="0" indent="0" algn="l" defTabSz="914400" rtl="0" eaLnBrk="1" fontAlgn="auto" latinLnBrk="0" hangingPunct="1">
+              <a:lnSpc>
+                <a:spcPct val="100000"/>
+              </a:lnSpc>
+              <a:spcBef>
+                <a:spcPts val="0"/>
+              </a:spcBef>
+              <a:spcAft>
+                <a:spcPts val="0"/>
+              </a:spcAft>
+              <a:buClrTx/>
+              <a:buSzTx/>
+              <a:buFontTx/>
+              <a:buNone/>
+              <a:tabLst/>
+              <a:defRPr/>
+            </a:pPr>
+            <a:r>
+              <a:rPr lang="it-IT" dirty="0"/>
+              <a:t>La sequenza FLAIR sopprime il segnale del liquido cerebrospinale e rende più evidenti le anomalie nel parenchima cerebrale.</a:t>
+            </a:r>
+          </a:p>
+          <a:p>
+            <a:pPr marL="0" marR="0" lvl="0" indent="0" algn="l" defTabSz="914400" rtl="0" eaLnBrk="1" fontAlgn="auto" latinLnBrk="0" hangingPunct="1">
+              <a:lnSpc>
+                <a:spcPct val="100000"/>
+              </a:lnSpc>
+              <a:spcBef>
+                <a:spcPts val="0"/>
+              </a:spcBef>
+              <a:spcAft>
+                <a:spcPts val="0"/>
+              </a:spcAft>
+              <a:buClrTx/>
+              <a:buSzTx/>
+              <a:buFontTx/>
+              <a:buNone/>
+              <a:tabLst/>
+              <a:defRPr/>
+            </a:pPr>
+            <a:r>
+              <a:rPr lang="it-IT" dirty="0"/>
+              <a:t>È molto importante perché mette bene in risalto l’edema </a:t>
+            </a:r>
+            <a:r>
+              <a:rPr lang="it-IT" dirty="0" err="1"/>
+              <a:t>peritumorale</a:t>
+            </a:r>
+            <a:r>
+              <a:rPr lang="it-IT" dirty="0"/>
+              <a:t> e quindi l’estensione complessiva della lesione.</a:t>
+            </a:r>
           </a:p>
         </p:txBody>
       </p:sp>
@@ -2870,7 +3603,22 @@
           <a:bodyPr/>
           <a:lstStyle/>
           <a:p>
-            <a:endParaRPr lang="it-IT" dirty="0"/>
+            <a:r>
+              <a:rPr lang="it-IT" dirty="0"/>
+              <a:t>La T1 è utile soprattutto per l’anatomia generale del cervello, poiché distingue bene sostanza grigia, sostanza bianca e liquido cerebrospinale.</a:t>
+            </a:r>
+          </a:p>
+          <a:p>
+            <a:r>
+              <a:rPr lang="it-IT" dirty="0"/>
+              <a:t>Tuttavia, da sola è poco sensibile al tumore, in quanto molte lesioni hanno intensità simili ai tessuti circostanti.</a:t>
+            </a:r>
+          </a:p>
+          <a:p>
+            <a:r>
+              <a:rPr lang="it-IT" dirty="0"/>
+              <a:t>Per questo nella pipeline questa sequenza non viene usata nella fusione multimodale, ma solo come riferimento visivo nelle figure di confronto.</a:t>
+            </a:r>
           </a:p>
         </p:txBody>
       </p:sp>
@@ -2978,6 +3726,26 @@
           <a:bodyPr/>
           <a:lstStyle/>
           <a:p>
+            <a:r>
+              <a:rPr lang="it-IT" dirty="0"/>
+              <a:t>La T1 con contrasto evidenzia bene la componente tumorale attiva, detta </a:t>
+            </a:r>
+            <a:r>
+              <a:rPr lang="it-IT" dirty="0" err="1"/>
+              <a:t>enhancing</a:t>
+            </a:r>
+            <a:r>
+              <a:rPr lang="it-IT" dirty="0"/>
+              <a:t>, grazie alla somministrazione di gadolinio nel paziente.</a:t>
+            </a:r>
+          </a:p>
+          <a:p>
+            <a:r>
+              <a:rPr lang="it-IT" dirty="0"/>
+              <a:t>Il limite è che non rappresenta bene l’estensione totale del tumore, ma solo la sua porzione più attiva e più centrale.</a:t>
+            </a:r>
+          </a:p>
+          <a:p>
             <a:endParaRPr lang="it-IT" dirty="0"/>
           </a:p>
         </p:txBody>
@@ -3086,7 +3854,35 @@
           <a:bodyPr/>
           <a:lstStyle/>
           <a:p>
-            <a:endParaRPr lang="it-IT" dirty="0"/>
+            <a:pPr marL="0" marR="0" lvl="0" indent="0" algn="l" defTabSz="914400" rtl="0" eaLnBrk="1" fontAlgn="auto" latinLnBrk="0" hangingPunct="1">
+              <a:lnSpc>
+                <a:spcPct val="100000"/>
+              </a:lnSpc>
+              <a:spcBef>
+                <a:spcPts val="0"/>
+              </a:spcBef>
+              <a:spcAft>
+                <a:spcPts val="0"/>
+              </a:spcAft>
+              <a:buClrTx/>
+              <a:buSzTx/>
+              <a:buFontTx/>
+              <a:buNone/>
+              <a:tabLst/>
+              <a:defRPr/>
+            </a:pPr>
+            <a:r>
+              <a:rPr lang="it-IT" dirty="0"/>
+              <a:t>La T2 è sensibile al contenuto d’acqua, quindi mette in evidenza edema e altre regioni </a:t>
+            </a:r>
+            <a:r>
+              <a:rPr lang="it-IT" dirty="0" err="1"/>
+              <a:t>iperintense</a:t>
+            </a:r>
+            <a:r>
+              <a:rPr lang="it-IT" dirty="0"/>
+              <a:t>. È utile per descrivere l’area patologica, ma è meno specifica delle componenti tumorali rispetto alla T1c.</a:t>
+            </a:r>
           </a:p>
         </p:txBody>
       </p:sp>
@@ -3194,7 +3990,120 @@
           <a:bodyPr/>
           <a:lstStyle/>
           <a:p>
-            <a:endParaRPr lang="it-IT" dirty="0"/>
+            <a:pPr marL="0" marR="0" lvl="0" indent="0" algn="l" defTabSz="914400" rtl="0" eaLnBrk="1" fontAlgn="auto" latinLnBrk="0" hangingPunct="1">
+              <a:lnSpc>
+                <a:spcPct val="100000"/>
+              </a:lnSpc>
+              <a:spcBef>
+                <a:spcPts val="0"/>
+              </a:spcBef>
+              <a:spcAft>
+                <a:spcPts val="0"/>
+              </a:spcAft>
+              <a:buClrTx/>
+              <a:buSzTx/>
+              <a:buFontTx/>
+              <a:buNone/>
+              <a:tabLst/>
+              <a:defRPr/>
+            </a:pPr>
+            <a:r>
+              <a:rPr lang="it-IT" dirty="0"/>
+              <a:t>Questa slide riassume la struttura complessiva della pipeline.</a:t>
+            </a:r>
+          </a:p>
+          <a:p>
+            <a:pPr marL="0" marR="0" lvl="0" indent="0" algn="l" defTabSz="914400" rtl="0" eaLnBrk="1" fontAlgn="auto" latinLnBrk="0" hangingPunct="1">
+              <a:lnSpc>
+                <a:spcPct val="100000"/>
+              </a:lnSpc>
+              <a:spcBef>
+                <a:spcPts val="0"/>
+              </a:spcBef>
+              <a:spcAft>
+                <a:spcPts val="0"/>
+              </a:spcAft>
+              <a:buClrTx/>
+              <a:buSzTx/>
+              <a:buFontTx/>
+              <a:buNone/>
+              <a:tabLst/>
+              <a:defRPr/>
+            </a:pPr>
+            <a:r>
+              <a:rPr lang="it-IT" dirty="0"/>
+              <a:t>Il flusso è composto da cinque fasi, tra cu EDA opzionale, </a:t>
+            </a:r>
+            <a:r>
+              <a:rPr lang="it-IT" dirty="0" err="1"/>
+              <a:t>pre</a:t>
+            </a:r>
+            <a:r>
+              <a:rPr lang="it-IT" dirty="0"/>
+              <a:t>-processing, segmentazione, post-processing e valutazione finale delle prestazioni.</a:t>
+            </a:r>
+          </a:p>
+          <a:p>
+            <a:pPr marL="0" marR="0" lvl="0" indent="0" algn="l" defTabSz="914400" rtl="0" eaLnBrk="1" fontAlgn="auto" latinLnBrk="0" hangingPunct="1">
+              <a:lnSpc>
+                <a:spcPct val="100000"/>
+              </a:lnSpc>
+              <a:spcBef>
+                <a:spcPts val="0"/>
+              </a:spcBef>
+              <a:spcAft>
+                <a:spcPts val="0"/>
+              </a:spcAft>
+              <a:buClrTx/>
+              <a:buSzTx/>
+              <a:buFontTx/>
+              <a:buNone/>
+              <a:tabLst/>
+              <a:defRPr/>
+            </a:pPr>
+            <a:r>
+              <a:rPr lang="it-IT" dirty="0"/>
+              <a:t>L’idea è partire da una preparazione robusta delle immagini, eseguire una segmentazione a cascata con tre metodi classici, rifinire morfologicamente il risultato e infine confrontarlo con la ground truth.</a:t>
+            </a:r>
+          </a:p>
+          <a:p>
+            <a:pPr marL="0" marR="0" lvl="0" indent="0" algn="l" defTabSz="914400" rtl="0" eaLnBrk="1" fontAlgn="auto" latinLnBrk="0" hangingPunct="1">
+              <a:lnSpc>
+                <a:spcPct val="100000"/>
+              </a:lnSpc>
+              <a:spcBef>
+                <a:spcPts val="0"/>
+              </a:spcBef>
+              <a:spcAft>
+                <a:spcPts val="0"/>
+              </a:spcAft>
+              <a:buClrTx/>
+              <a:buSzTx/>
+              <a:buFontTx/>
+              <a:buNone/>
+              <a:tabLst/>
+              <a:defRPr/>
+            </a:pPr>
+            <a:r>
+              <a:rPr lang="it-IT" dirty="0"/>
+              <a:t>La pipeline è stata implementata in modo modulare in MATLAB con script e funzioni separate. Nello specifico, l’algoritmo del </a:t>
+            </a:r>
+            <a:r>
+              <a:rPr lang="it-IT" dirty="0" err="1"/>
+              <a:t>Region</a:t>
+            </a:r>
+            <a:r>
+              <a:rPr lang="it-IT" dirty="0"/>
+              <a:t> </a:t>
+            </a:r>
+            <a:r>
+              <a:rPr lang="it-IT" dirty="0" err="1"/>
+              <a:t>Growing</a:t>
+            </a:r>
+            <a:r>
+              <a:rPr lang="it-IT" dirty="0"/>
+              <a:t> è stato implementato from scratch.</a:t>
+            </a:r>
           </a:p>
         </p:txBody>
       </p:sp>
@@ -5041,7 +5950,7 @@
         </p:nvSpPr>
         <p:spPr>
           <a:xfrm>
-            <a:off x="3402792" y="1776866"/>
+            <a:off x="3402792" y="1887228"/>
             <a:ext cx="5386411" cy="523220"/>
           </a:xfrm>
           <a:prstGeom prst="rect">
@@ -13896,7 +14805,7 @@
             <p:nvPr/>
           </p:nvPicPr>
           <p:blipFill>
-            <a:blip r:embed="rId2">
+            <a:blip r:embed="rId3">
               <a:extLst>
                 <a:ext uri="{28A0092B-C50C-407E-A947-70E740481C1C}">
                   <a14:useLocalDpi xmlns:a14="http://schemas.microsoft.com/office/drawing/2010/main" val="0"/>
@@ -13933,7 +14842,7 @@
             <p:nvPr/>
           </p:nvPicPr>
           <p:blipFill>
-            <a:blip r:embed="rId2">
+            <a:blip r:embed="rId3">
               <a:extLst>
                 <a:ext uri="{28A0092B-C50C-407E-A947-70E740481C1C}">
                   <a14:useLocalDpi xmlns:a14="http://schemas.microsoft.com/office/drawing/2010/main" val="0"/>
@@ -21631,6 +22540,42 @@
           <a:chExt cx="0" cy="0"/>
         </a:xfrm>
       </p:grpSpPr>
+      <p:pic>
+        <p:nvPicPr>
+          <p:cNvPr id="17" name="Elemento grafico 16">
+            <a:extLst>
+              <a:ext uri="{FF2B5EF4-FFF2-40B4-BE49-F238E27FC236}">
+                <a16:creationId xmlns:a16="http://schemas.microsoft.com/office/drawing/2014/main" id="{44B361DA-5D62-F27A-B9C2-7EBABB43DA19}"/>
+              </a:ext>
+            </a:extLst>
+          </p:cNvPr>
+          <p:cNvPicPr>
+            <a:picLocks noChangeAspect="1"/>
+          </p:cNvPicPr>
+          <p:nvPr/>
+        </p:nvPicPr>
+        <p:blipFill>
+          <a:blip>
+            <a:extLst>
+              <a:ext uri="{96DAC541-7B7A-43D3-8B79-37D633B846F1}">
+                <asvg:svgBlip xmlns:asvg="http://schemas.microsoft.com/office/drawing/2016/SVG/main" r:embed="rId3"/>
+              </a:ext>
+            </a:extLst>
+          </a:blip>
+          <a:stretch>
+            <a:fillRect/>
+          </a:stretch>
+        </p:blipFill>
+        <p:spPr>
+          <a:xfrm>
+            <a:off x="389662" y="1723382"/>
+            <a:ext cx="11412677" cy="1383185"/>
+          </a:xfrm>
+          <a:prstGeom prst="rect">
+            <a:avLst/>
+          </a:prstGeom>
+        </p:spPr>
+      </p:pic>
       <p:sp>
         <p:nvSpPr>
           <p:cNvPr id="5" name="CasellaDiTesto 4">
@@ -21887,42 +22832,6 @@
           </a:p>
         </p:txBody>
       </p:sp>
-      <p:pic>
-        <p:nvPicPr>
-          <p:cNvPr id="3" name="Elemento grafico 2">
-            <a:extLst>
-              <a:ext uri="{FF2B5EF4-FFF2-40B4-BE49-F238E27FC236}">
-                <a16:creationId xmlns:a16="http://schemas.microsoft.com/office/drawing/2014/main" id="{2B806B9A-38EB-F5F5-3FC6-A07B51C33F4D}"/>
-              </a:ext>
-            </a:extLst>
-          </p:cNvPr>
-          <p:cNvPicPr>
-            <a:picLocks noChangeAspect="1"/>
-          </p:cNvPicPr>
-          <p:nvPr/>
-        </p:nvPicPr>
-        <p:blipFill>
-          <a:blip>
-            <a:extLst>
-              <a:ext uri="{96DAC541-7B7A-43D3-8B79-37D633B846F1}">
-                <asvg:svgBlip xmlns:asvg="http://schemas.microsoft.com/office/drawing/2016/SVG/main" r:embed="rId3"/>
-              </a:ext>
-            </a:extLst>
-          </a:blip>
-          <a:stretch>
-            <a:fillRect/>
-          </a:stretch>
-        </p:blipFill>
-        <p:spPr>
-          <a:xfrm>
-            <a:off x="452723" y="1723382"/>
-            <a:ext cx="11377312" cy="1378899"/>
-          </a:xfrm>
-          <a:prstGeom prst="rect">
-            <a:avLst/>
-          </a:prstGeom>
-        </p:spPr>
-      </p:pic>
       <p:sp>
         <p:nvSpPr>
           <p:cNvPr id="8" name="CasellaDiTesto 7">
